--- a/Quadro_Aulas_Report_2026-06-16.pptx
+++ b/Quadro_Aulas_Report_2026-06-16.pptx
@@ -1038,7 +1038,7 @@
                   <a:srgbClr val="8FA3C0"/>
                 </a:solidFill>
               </a:rPr>
-              <a:t>16 de Junho de 2026 as 08:37</a:t>
+              <a:t>16 de Junho de 2026 as 09:58</a:t>
             </a:r>
             <a:endParaRPr lang="en-US" sz="700" dirty="0"/>
           </a:p>
@@ -3767,7 +3767,7 @@
                   <a:srgbClr val="D97706"/>
                 </a:solidFill>
               </a:rPr>
-              <a:t>1206.2h</a:t>
+              <a:t>1213.2h</a:t>
             </a:r>
             <a:endParaRPr lang="en-US" sz="2400" dirty="0"/>
           </a:p>
@@ -4033,7 +4033,7 @@
                   <a:srgbClr val="D97706"/>
                 </a:solidFill>
               </a:rPr>
-              <a:t>+113.7h</a:t>
+              <a:t>+120.7h</a:t>
             </a:r>
             <a:endParaRPr lang="en-US" sz="2400" dirty="0"/>
           </a:p>
@@ -4069,7 +4069,7 @@
                   <a:srgbClr val="888888"/>
                 </a:solidFill>
               </a:rPr>
-              <a:t>projetado: 1354.7h (+9%)</a:t>
+              <a:t>projetado: 1361.7h (+10%)</a:t>
             </a:r>
             <a:endParaRPr lang="en-US" sz="700" dirty="0"/>
           </a:p>
@@ -4084,7 +4084,7 @@
         <p:spPr>
           <a:xfrm>
             <a:off x="2441448" y="2916936"/>
-            <a:ext cx="8589440" cy="54864"/>
+            <a:ext cx="8594877" cy="54864"/>
           </a:xfrm>
           <a:prstGeom prst="rect">
             <a:avLst/>
@@ -4108,8 +4108,8 @@
         </p:nvSpPr>
         <p:spPr>
           <a:xfrm>
-            <a:off x="11030888" y="2916936"/>
-            <a:ext cx="1057480" cy="54864"/>
+            <a:off x="11036325" y="2916936"/>
+            <a:ext cx="1052043" cy="54864"/>
           </a:xfrm>
           <a:prstGeom prst="rect">
             <a:avLst/>
@@ -5372,7 +5372,7 @@
                   <a:srgbClr val="888888"/>
                 </a:solidFill>
               </a:rPr>
-              <a:t>26 Sub Bug (ADO) · 117.8h</a:t>
+              <a:t>26 Sub Bug (ADO) · 124.8h</a:t>
             </a:r>
             <a:endParaRPr lang="en-US" sz="700" dirty="0"/>
           </a:p>
@@ -7053,7 +7053,7 @@
                   <a:srgbClr val="D85A30"/>
                 </a:solidFill>
               </a:rPr>
-              <a:t>297.5h · 46 subs finalizadas</a:t>
+              <a:t>304.5h · 46 subs finalizadas</a:t>
             </a:r>
             <a:endParaRPr lang="en-US" sz="950" dirty="0"/>
           </a:p>

--- a/Quadro_Aulas_Report_2026-06-16.pptx
+++ b/Quadro_Aulas_Report_2026-06-16.pptx
@@ -1038,7 +1038,7 @@
                   <a:srgbClr val="8FA3C0"/>
                 </a:solidFill>
               </a:rPr>
-              <a:t>16 de Junho de 2026 as 09:58</a:t>
+              <a:t>16 de Junho de 2026 as 19:51</a:t>
             </a:r>
             <a:endParaRPr lang="en-US" sz="700" dirty="0"/>
           </a:p>
@@ -1135,7 +1135,7 @@
                   <a:srgbClr val="FFFFFF"/>
                 </a:solidFill>
               </a:rPr>
-              <a:t>386</a:t>
+              <a:t>387</a:t>
             </a:r>
             <a:endParaRPr lang="en-US" sz="2400" dirty="0"/>
           </a:p>
@@ -1207,7 +1207,7 @@
                   <a:srgbClr val="4ADE80"/>
                 </a:solidFill>
               </a:rPr>
-              <a:t>306</a:t>
+              <a:t>307</a:t>
             </a:r>
             <a:endParaRPr lang="en-US" sz="2400" dirty="0"/>
           </a:p>
@@ -1279,7 +1279,7 @@
                   <a:srgbClr val="FCD34D"/>
                 </a:solidFill>
               </a:rPr>
-              <a:t>12</a:t>
+              <a:t>11</a:t>
             </a:r>
             <a:endParaRPr lang="en-US" sz="2400" dirty="0"/>
           </a:p>
@@ -1351,7 +1351,7 @@
                   <a:srgbClr val="F87171"/>
                 </a:solidFill>
               </a:rPr>
-              <a:t>48</a:t>
+              <a:t>49</a:t>
             </a:r>
             <a:endParaRPr lang="en-US" sz="2400" dirty="0"/>
           </a:p>
@@ -1473,7 +1473,7 @@
                   <a:srgbClr val="8FA3C0"/>
                 </a:solidFill>
               </a:rPr>
-              <a:t>79% concluido  .  306 de 386 itens</a:t>
+              <a:t>79% concluido  .  307 de 387 itens</a:t>
             </a:r>
             <a:endParaRPr lang="en-US" sz="700" dirty="0"/>
           </a:p>
@@ -2227,7 +2227,7 @@
                   <a:srgbClr val="222222"/>
                 </a:solidFill>
               </a:rPr>
-              <a:t>7 Stories · 3 NFT · 113 itens</a:t>
+              <a:t>7 Stories · 4 NFT · 113 itens</a:t>
             </a:r>
             <a:endParaRPr lang="en-US" sz="750" dirty="0"/>
           </a:p>
@@ -2339,7 +2339,7 @@
         <p:spPr>
           <a:xfrm>
             <a:off x="4946904" y="859536"/>
-            <a:ext cx="1542593" cy="50292"/>
+            <a:ext cx="1410371" cy="50292"/>
           </a:xfrm>
           <a:prstGeom prst="rect">
             <a:avLst/>
@@ -2385,7 +2385,7 @@
                   <a:srgbClr val="888888"/>
                 </a:solidFill>
               </a:rPr>
-              <a:t>Stories/NFTs: 70% · 7 de 10</a:t>
+              <a:t>Stories/NFTs: 64% · 7 de 11</a:t>
             </a:r>
             <a:endParaRPr lang="en-US" sz="650" dirty="0"/>
           </a:p>
@@ -3214,7 +3214,7 @@
                   <a:srgbClr val="222222"/>
                 </a:solidFill>
               </a:rPr>
-              <a:t>17 Stories · 119 itens</a:t>
+              <a:t>17 Stories · 120 itens</a:t>
             </a:r>
             <a:endParaRPr lang="en-US" sz="750" dirty="0"/>
           </a:p>
@@ -3250,7 +3250,7 @@
                   <a:srgbClr val="222222"/>
                 </a:solidFill>
               </a:rPr>
-              <a:t>A Fazer: 27 . Em progresso: 5 . Finalizados: 86</a:t>
+              <a:t>A Fazer: 28 . Em progresso: 5 . Finalizados: 86</a:t>
             </a:r>
             <a:endParaRPr lang="en-US" sz="750" dirty="0"/>
           </a:p>
@@ -3286,7 +3286,7 @@
                   <a:srgbClr val="222222"/>
                 </a:solidFill>
               </a:rPr>
-              <a:t>Est: 495.5h . Real: 254.8h . Rem: 111h</a:t>
+              <a:t>Est: 497.5h . Real: 254.8h . Rem: 113h</a:t>
             </a:r>
             <a:endParaRPr lang="en-US" sz="750" dirty="0"/>
           </a:p>
@@ -3458,7 +3458,7 @@
                   <a:srgbClr val="888888"/>
                 </a:solidFill>
               </a:rPr>
-              <a:t>Subs: 72% · 86 de 119</a:t>
+              <a:t>Subs: 72% · 86 de 120</a:t>
             </a:r>
             <a:endParaRPr lang="en-US" sz="650" dirty="0"/>
           </a:p>
@@ -3494,7 +3494,7 @@
                   <a:srgbClr val="1D9E75"/>
                 </a:solidFill>
               </a:rPr>
-              <a:t>Projetado: 365.8h (-129.7h / -26%)</a:t>
+              <a:t>Projetado: 367.8h (-129.7h / -26%)</a:t>
             </a:r>
             <a:endParaRPr lang="en-US" sz="800" dirty="0"/>
           </a:p>
@@ -3634,7 +3634,7 @@
                   <a:srgbClr val="222222"/>
                 </a:solidFill>
               </a:rPr>
-              <a:t>1241h</a:t>
+              <a:t>1243h</a:t>
             </a:r>
             <a:endParaRPr lang="en-US" sz="2400" dirty="0"/>
           </a:p>
@@ -3767,7 +3767,7 @@
                   <a:srgbClr val="D97706"/>
                 </a:solidFill>
               </a:rPr>
-              <a:t>1213.2h</a:t>
+              <a:t>1215.2h</a:t>
             </a:r>
             <a:endParaRPr lang="en-US" sz="2400" dirty="0"/>
           </a:p>
@@ -3900,7 +3900,7 @@
                   <a:srgbClr val="F87171"/>
                 </a:solidFill>
               </a:rPr>
-              <a:t>148.5h</a:t>
+              <a:t>150.5h</a:t>
             </a:r>
             <a:endParaRPr lang="en-US" sz="2400" dirty="0"/>
           </a:p>
@@ -4033,7 +4033,7 @@
                   <a:srgbClr val="D97706"/>
                 </a:solidFill>
               </a:rPr>
-              <a:t>+120.7h</a:t>
+              <a:t>+122.7h</a:t>
             </a:r>
             <a:endParaRPr lang="en-US" sz="2400" dirty="0"/>
           </a:p>
@@ -4069,7 +4069,7 @@
                   <a:srgbClr val="888888"/>
                 </a:solidFill>
               </a:rPr>
-              <a:t>projetado: 1361.7h (+10%)</a:t>
+              <a:t>projetado: 1365.7h (+10%)</a:t>
             </a:r>
             <a:endParaRPr lang="en-US" sz="700" dirty="0"/>
           </a:p>
@@ -4084,7 +4084,7 @@
         <p:spPr>
           <a:xfrm>
             <a:off x="2441448" y="2916936"/>
-            <a:ext cx="8594877" cy="54864"/>
+            <a:ext cx="8583830" cy="54864"/>
           </a:xfrm>
           <a:prstGeom prst="rect">
             <a:avLst/>
@@ -4108,8 +4108,8 @@
         </p:nvSpPr>
         <p:spPr>
           <a:xfrm>
-            <a:off x="11036325" y="2916936"/>
-            <a:ext cx="1052043" cy="54864"/>
+            <a:off x="11025278" y="2916936"/>
+            <a:ext cx="1063090" cy="54864"/>
           </a:xfrm>
           <a:prstGeom prst="rect">
             <a:avLst/>
@@ -5372,7 +5372,7 @@
                   <a:srgbClr val="888888"/>
                 </a:solidFill>
               </a:rPr>
-              <a:t>26 Sub Bug (ADO) · 124.8h</a:t>
+              <a:t>26 Sub Bug (ADO) · 126.8h</a:t>
             </a:r>
             <a:endParaRPr lang="en-US" sz="700" dirty="0"/>
           </a:p>
@@ -5430,10 +5430,10 @@
             <a:r>
               <a:rPr lang="en-US" sz="2200" b="1" dirty="0">
                 <a:solidFill>
-                  <a:srgbClr val="DC2626"/>
-                </a:solidFill>
-              </a:rPr>
-              <a:t>29</a:t>
+                  <a:srgbClr val="D97706"/>
+                </a:solidFill>
+              </a:rPr>
+              <a:t>24</a:t>
             </a:r>
             <a:endParaRPr lang="en-US" sz="2200" dirty="0"/>
           </a:p>
@@ -5505,7 +5505,7 @@
                   <a:srgbClr val="888888"/>
                 </a:solidFill>
               </a:rPr>
-              <a:t>fixes sem card no Git · 49% do time com card</a:t>
+              <a:t>fixes sem card no Git · 54% do time com card</a:t>
             </a:r>
             <a:endParaRPr lang="en-US" sz="700" dirty="0"/>
           </a:p>
@@ -6225,7 +6225,7 @@
                   <a:srgbClr val="FFFFFF"/>
                 </a:solidFill>
               </a:rPr>
-              <a:t>151.4h</a:t>
+              <a:t>106.3h</a:t>
             </a:r>
             <a:endParaRPr lang="en-US" sz="650" dirty="0"/>
           </a:p>
@@ -6275,7 +6275,7 @@
                   <a:srgbClr val="222222"/>
                 </a:solidFill>
               </a:rPr>
-              <a:t>7 Bugs · 7 SRs no periodo</a:t>
+              <a:t>7 Bugs · 6 SRs no periodo</a:t>
             </a:r>
             <a:endParaRPr lang="en-US" sz="750" dirty="0"/>
           </a:p>
@@ -6311,7 +6311,7 @@
                   <a:srgbClr val="222222"/>
                 </a:solidFill>
               </a:rPr>
-              <a:t>Horas nao planejadas: 151.4h</a:t>
+              <a:t>Horas nao planejadas: 106.3h</a:t>
             </a:r>
             <a:endParaRPr lang="en-US" sz="750" dirty="0"/>
           </a:p>
@@ -6440,7 +6440,7 @@
                   <a:srgbClr val="FFFFFF"/>
                 </a:solidFill>
               </a:rPr>
-              <a:t>123</a:t>
+              <a:t>124</a:t>
             </a:r>
             <a:endParaRPr lang="en-US" sz="650" dirty="0"/>
           </a:p>
@@ -6490,7 +6490,7 @@
                   <a:srgbClr val="222222"/>
                 </a:solidFill>
               </a:rPr>
-              <a:t>123 itens criados pos 01/05</a:t>
+              <a:t>124 itens criados pos 01/05</a:t>
             </a:r>
             <a:endParaRPr lang="en-US" sz="750" dirty="0"/>
           </a:p>
@@ -6526,7 +6526,7 @@
                   <a:srgbClr val="222222"/>
                 </a:solidFill>
               </a:rPr>
-              <a:t>Princ +55h · Redund +165h · Obs +16h</a:t>
+              <a:t>Princ +55h · Redund +165h · Obs +18h</a:t>
             </a:r>
             <a:endParaRPr lang="en-US" sz="750" dirty="0"/>
           </a:p>
@@ -7304,7 +7304,7 @@
                   <a:srgbClr val="D97706"/>
                 </a:solidFill>
               </a:rPr>
-              <a:t>266.2h · 33 subs finalizadas</a:t>
+              <a:t>268.2h · 34 subs finalizadas</a:t>
             </a:r>
             <a:endParaRPr lang="en-US" sz="950" dirty="0"/>
           </a:p>
@@ -7699,7 +7699,7 @@
         <p:spPr>
           <a:xfrm>
             <a:off x="7360920" y="6153912"/>
-            <a:ext cx="708216" cy="73152"/>
+            <a:ext cx="703632" cy="73152"/>
           </a:xfrm>
           <a:prstGeom prst="rect">
             <a:avLst/>
@@ -7781,7 +7781,7 @@
                   <a:srgbClr val="888888"/>
                 </a:solidFill>
               </a:rPr>
-              <a:t>307h estimadas</a:t>
+              <a:t>309h estimadas</a:t>
             </a:r>
             <a:endParaRPr lang="en-US" sz="850" dirty="0"/>
           </a:p>
@@ -8093,7 +8093,7 @@
                   <a:srgbClr val="DC2626"/>
                 </a:solidFill>
               </a:rPr>
-              <a:t>⚠ 12 fix(s) sem card</a:t>
+              <a:t>⚠ 7 fix(s) sem card</a:t>
             </a:r>
             <a:endParaRPr lang="en-US" sz="750" dirty="0"/>
           </a:p>
